--- a/기존 IM/templates/내용 페이지 레이아웃.pptx
+++ b/기존 IM/templates/내용 페이지 레이아웃.pptx
@@ -104,6 +104,11 @@
       </a:defRPr>
     </a:lvl9pPr>
   </p:defaultTextStyle>
+  <p:extLst>
+    <p:ext uri="{EFAFB233-063F-42B5-8137-9DF3F51BA10A}">
+      <p15:sldGuideLst xmlns:p15="http://schemas.microsoft.com/office/powerpoint/2012/main"/>
+    </p:ext>
+  </p:extLst>
 </p:presentation>
 </file>
 
@@ -238,7 +243,7 @@
           <a:p>
             <a:fld id="{F49F937E-B9FE-4FCA-A03B-3A1B55B81B3A}" type="datetimeFigureOut">
               <a:rPr lang="ko-KR" altLang="en-US" smtClean="0"/>
-              <a:t>2026-07-21</a:t>
+              <a:t>2026-10-19</a:t>
             </a:fld>
             <a:endParaRPr lang="ko-KR" altLang="en-US"/>
           </a:p>
@@ -408,7 +413,7 @@
           <a:p>
             <a:fld id="{F49F937E-B9FE-4FCA-A03B-3A1B55B81B3A}" type="datetimeFigureOut">
               <a:rPr lang="ko-KR" altLang="en-US" smtClean="0"/>
-              <a:t>2026-07-21</a:t>
+              <a:t>2026-10-19</a:t>
             </a:fld>
             <a:endParaRPr lang="ko-KR" altLang="en-US"/>
           </a:p>
@@ -588,7 +593,7 @@
           <a:p>
             <a:fld id="{F49F937E-B9FE-4FCA-A03B-3A1B55B81B3A}" type="datetimeFigureOut">
               <a:rPr lang="ko-KR" altLang="en-US" smtClean="0"/>
-              <a:t>2026-07-21</a:t>
+              <a:t>2026-10-19</a:t>
             </a:fld>
             <a:endParaRPr lang="ko-KR" altLang="en-US"/>
           </a:p>
@@ -1176,7 +1181,7 @@
           <a:p>
             <a:fld id="{F49F937E-B9FE-4FCA-A03B-3A1B55B81B3A}" type="datetimeFigureOut">
               <a:rPr lang="ko-KR" altLang="en-US" smtClean="0"/>
-              <a:t>2026-07-21</a:t>
+              <a:t>2026-10-19</a:t>
             </a:fld>
             <a:endParaRPr lang="ko-KR" altLang="en-US"/>
           </a:p>
@@ -1420,7 +1425,7 @@
           <a:p>
             <a:fld id="{F49F937E-B9FE-4FCA-A03B-3A1B55B81B3A}" type="datetimeFigureOut">
               <a:rPr lang="ko-KR" altLang="en-US" smtClean="0"/>
-              <a:t>2026-07-21</a:t>
+              <a:t>2026-10-19</a:t>
             </a:fld>
             <a:endParaRPr lang="ko-KR" altLang="en-US"/>
           </a:p>
@@ -1652,7 +1657,7 @@
           <a:p>
             <a:fld id="{F49F937E-B9FE-4FCA-A03B-3A1B55B81B3A}" type="datetimeFigureOut">
               <a:rPr lang="ko-KR" altLang="en-US" smtClean="0"/>
-              <a:t>2026-07-21</a:t>
+              <a:t>2026-10-19</a:t>
             </a:fld>
             <a:endParaRPr lang="ko-KR" altLang="en-US"/>
           </a:p>
@@ -2019,7 +2024,7 @@
           <a:p>
             <a:fld id="{F49F937E-B9FE-4FCA-A03B-3A1B55B81B3A}" type="datetimeFigureOut">
               <a:rPr lang="ko-KR" altLang="en-US" smtClean="0"/>
-              <a:t>2026-07-21</a:t>
+              <a:t>2026-10-19</a:t>
             </a:fld>
             <a:endParaRPr lang="ko-KR" altLang="en-US"/>
           </a:p>
@@ -2137,7 +2142,7 @@
           <a:p>
             <a:fld id="{F49F937E-B9FE-4FCA-A03B-3A1B55B81B3A}" type="datetimeFigureOut">
               <a:rPr lang="ko-KR" altLang="en-US" smtClean="0"/>
-              <a:t>2026-07-21</a:t>
+              <a:t>2026-10-19</a:t>
             </a:fld>
             <a:endParaRPr lang="ko-KR" altLang="en-US"/>
           </a:p>
@@ -2232,7 +2237,7 @@
           <a:p>
             <a:fld id="{F49F937E-B9FE-4FCA-A03B-3A1B55B81B3A}" type="datetimeFigureOut">
               <a:rPr lang="ko-KR" altLang="en-US" smtClean="0"/>
-              <a:t>2026-07-21</a:t>
+              <a:t>2026-10-19</a:t>
             </a:fld>
             <a:endParaRPr lang="ko-KR" altLang="en-US"/>
           </a:p>
@@ -2509,7 +2514,7 @@
           <a:p>
             <a:fld id="{F49F937E-B9FE-4FCA-A03B-3A1B55B81B3A}" type="datetimeFigureOut">
               <a:rPr lang="ko-KR" altLang="en-US" smtClean="0"/>
-              <a:t>2026-07-21</a:t>
+              <a:t>2026-10-19</a:t>
             </a:fld>
             <a:endParaRPr lang="ko-KR" altLang="en-US"/>
           </a:p>
@@ -2766,7 +2771,7 @@
           <a:p>
             <a:fld id="{F49F937E-B9FE-4FCA-A03B-3A1B55B81B3A}" type="datetimeFigureOut">
               <a:rPr lang="ko-KR" altLang="en-US" smtClean="0"/>
-              <a:t>2026-07-21</a:t>
+              <a:t>2026-10-19</a:t>
             </a:fld>
             <a:endParaRPr lang="ko-KR" altLang="en-US"/>
           </a:p>
@@ -2979,7 +2984,7 @@
           <a:p>
             <a:fld id="{F49F937E-B9FE-4FCA-A03B-3A1B55B81B3A}" type="datetimeFigureOut">
               <a:rPr lang="ko-KR" altLang="en-US" smtClean="0"/>
-              <a:t>2026-07-21</a:t>
+              <a:t>2026-10-19</a:t>
             </a:fld>
             <a:endParaRPr lang="ko-KR" altLang="en-US"/>
           </a:p>
@@ -3405,8 +3410,9 @@
             </a:pPr>
             <a:r>
               <a:rPr lang="ko-KR" altLang="en-US" dirty="0">
-                <a:latin typeface="피플폰트 Bold" panose="020B0600000101010101" pitchFamily="50" charset="-127"/>
-                <a:ea typeface="피플폰트 Bold" panose="020B0600000101010101" pitchFamily="50" charset="-127"/>
+                <a:latin typeface="Pretendard Variable ExtraBold" panose="02000003000000020004" pitchFamily="2" charset="-127"/>
+                <a:ea typeface="Pretendard Variable ExtraBold" panose="02000003000000020004" pitchFamily="2" charset="-127"/>
+                <a:cs typeface="Pretendard Variable ExtraBold" panose="02000003000000020004" pitchFamily="2" charset="-127"/>
               </a:rPr>
               <a:t>제목</a:t>
             </a:r>
@@ -3436,8 +3442,9 @@
           <a:p>
             <a:r>
               <a:rPr lang="ko-KR" altLang="en-US" dirty="0">
-                <a:latin typeface="피플폰트 Bold" panose="020B0600000101010101" pitchFamily="50" charset="-127"/>
-                <a:ea typeface="피플폰트 Bold" panose="020B0600000101010101" pitchFamily="50" charset="-127"/>
+                <a:latin typeface="Pretendard Variable ExtraBold" panose="02000003000000020004" pitchFamily="2" charset="-127"/>
+                <a:ea typeface="Pretendard Variable ExtraBold" panose="02000003000000020004" pitchFamily="2" charset="-127"/>
+                <a:cs typeface="Pretendard Variable ExtraBold" panose="02000003000000020004" pitchFamily="2" charset="-127"/>
               </a:rPr>
               <a:t>소제목</a:t>
             </a:r>
@@ -3648,8 +3655,9 @@
             </a:pPr>
             <a:r>
               <a:rPr lang="ko-KR" altLang="en-US" sz="1000" dirty="0">
-                <a:latin typeface="피플폰트 Bold" panose="020B0600000101010101" pitchFamily="50" charset="-127"/>
-                <a:ea typeface="피플폰트 Bold" panose="020B0600000101010101" pitchFamily="50" charset="-127"/>
+                <a:latin typeface="Pretendard Variable ExtraBold" panose="02000003000000020004" pitchFamily="2" charset="-127"/>
+                <a:ea typeface="Pretendard Variable ExtraBold" panose="02000003000000020004" pitchFamily="2" charset="-127"/>
+                <a:cs typeface="Pretendard Variable ExtraBold" panose="02000003000000020004" pitchFamily="2" charset="-127"/>
               </a:rPr>
               <a:t>페이지 요약</a:t>
             </a:r>
